--- a/history-brief/Buffalo Soldiers Brief.pptx
+++ b/history-brief/Buffalo Soldiers Brief.pptx
@@ -199,7 +199,7 @@
           <a:p>
             <a:fld id="{2E531338-088F-45C5-9E26-33E9CE708819}" type="datetimeFigureOut">
               <a:rPr lang="en-US" smtClean="0"/>
-              <a:t>8/28/2021</a:t>
+              <a:t>11/2/2021</a:t>
             </a:fld>
             <a:endParaRPr lang="en-US"/>
           </a:p>
@@ -732,7 +732,7 @@
           <a:p>
             <a:fld id="{868437A5-6AB3-45F9-9204-FCE4DEE24287}" type="datetime1">
               <a:rPr lang="en-US" smtClean="0"/>
-              <a:t>8/28/2021</a:t>
+              <a:t>11/2/2021</a:t>
             </a:fld>
             <a:endParaRPr lang="en-US"/>
           </a:p>
@@ -902,7 +902,7 @@
           <a:p>
             <a:fld id="{F0A2BB24-666B-4A52-933A-904964341520}" type="datetime1">
               <a:rPr lang="en-US" smtClean="0"/>
-              <a:t>8/28/2021</a:t>
+              <a:t>11/2/2021</a:t>
             </a:fld>
             <a:endParaRPr lang="en-US"/>
           </a:p>
@@ -1082,7 +1082,7 @@
           <a:p>
             <a:fld id="{332C720A-73B0-4024-A60E-B471A0CB9730}" type="datetime1">
               <a:rPr lang="en-US" smtClean="0"/>
-              <a:t>8/28/2021</a:t>
+              <a:t>11/2/2021</a:t>
             </a:fld>
             <a:endParaRPr lang="en-US"/>
           </a:p>
@@ -1252,7 +1252,7 @@
           <a:p>
             <a:fld id="{158322A4-C835-4D36-8F62-6CAB579A367C}" type="datetime1">
               <a:rPr lang="en-US" smtClean="0"/>
-              <a:t>8/28/2021</a:t>
+              <a:t>11/2/2021</a:t>
             </a:fld>
             <a:endParaRPr lang="en-US"/>
           </a:p>
@@ -1498,7 +1498,7 @@
           <a:p>
             <a:fld id="{A711D463-D710-4444-86A6-C87A48C3C7E8}" type="datetime1">
               <a:rPr lang="en-US" smtClean="0"/>
-              <a:t>8/28/2021</a:t>
+              <a:t>11/2/2021</a:t>
             </a:fld>
             <a:endParaRPr lang="en-US"/>
           </a:p>
@@ -1786,7 +1786,7 @@
           <a:p>
             <a:fld id="{62FD910D-592E-4DC2-AE87-3505C7F51594}" type="datetime1">
               <a:rPr lang="en-US" smtClean="0"/>
-              <a:t>8/28/2021</a:t>
+              <a:t>11/2/2021</a:t>
             </a:fld>
             <a:endParaRPr lang="en-US"/>
           </a:p>
@@ -2208,7 +2208,7 @@
           <a:p>
             <a:fld id="{3DBA7C22-B319-412B-9B7E-79B021FE5AF5}" type="datetime1">
               <a:rPr lang="en-US" smtClean="0"/>
-              <a:t>8/28/2021</a:t>
+              <a:t>11/2/2021</a:t>
             </a:fld>
             <a:endParaRPr lang="en-US"/>
           </a:p>
@@ -2326,7 +2326,7 @@
           <a:p>
             <a:fld id="{FCAFFA14-C6A0-4AB4-A5F0-CD8D2177F1D0}" type="datetime1">
               <a:rPr lang="en-US" smtClean="0"/>
-              <a:t>8/28/2021</a:t>
+              <a:t>11/2/2021</a:t>
             </a:fld>
             <a:endParaRPr lang="en-US"/>
           </a:p>
@@ -2421,7 +2421,7 @@
           <a:p>
             <a:fld id="{8F0124CA-06D1-4926-9F55-5BC536647AB4}" type="datetime1">
               <a:rPr lang="en-US" smtClean="0"/>
-              <a:t>8/28/2021</a:t>
+              <a:t>11/2/2021</a:t>
             </a:fld>
             <a:endParaRPr lang="en-US"/>
           </a:p>
@@ -2698,7 +2698,7 @@
           <a:p>
             <a:fld id="{1D187106-37D1-44C8-A9DC-4A722FE61CA6}" type="datetime1">
               <a:rPr lang="en-US" smtClean="0"/>
-              <a:t>8/28/2021</a:t>
+              <a:t>11/2/2021</a:t>
             </a:fld>
             <a:endParaRPr lang="en-US"/>
           </a:p>
@@ -2951,7 +2951,7 @@
           <a:p>
             <a:fld id="{A27AF8D4-3BE8-483B-A815-5F1B54BAF003}" type="datetime1">
               <a:rPr lang="en-US" smtClean="0"/>
-              <a:t>8/28/2021</a:t>
+              <a:t>11/2/2021</a:t>
             </a:fld>
             <a:endParaRPr lang="en-US"/>
           </a:p>
@@ -3164,7 +3164,7 @@
           <a:p>
             <a:fld id="{A81484D1-0697-4D7B-9EC6-DCF1A390A541}" type="datetime1">
               <a:rPr lang="en-US" smtClean="0"/>
-              <a:t>8/28/2021</a:t>
+              <a:t>11/2/2021</a:t>
             </a:fld>
             <a:endParaRPr lang="en-US"/>
           </a:p>
@@ -3578,7 +3578,15 @@
             </a:r>
             <a:r>
               <a:rPr lang="en-US" dirty="0" smtClean="0"/>
-              <a:t> Calvary Buffalo Soldiers</a:t>
+              <a:t> </a:t>
+            </a:r>
+            <a:r>
+              <a:rPr lang="en-US" dirty="0" smtClean="0"/>
+              <a:t>Cavalry Buffalo </a:t>
+            </a:r>
+            <a:r>
+              <a:rPr lang="en-US" dirty="0" smtClean="0"/>
+              <a:t>Soldiers</a:t>
             </a:r>
             <a:endParaRPr lang="en-US" dirty="0"/>
           </a:p>
@@ -3810,7 +3818,7 @@
           </a:ln>
           <a:extLst>
             <a:ext uri="{C572A759-6A51-4108-AA02-DFA0A04FC94B}">
-              <ma14:wrappingTextBoxFlag xmlns="" xmlns:m="http://schemas.openxmlformats.org/officeDocument/2006/math" xmlns:a14="http://schemas.microsoft.com/office/drawing/2010/main" xmlns:ma14="http://schemas.microsoft.com/office/mac/drawingml/2011/main" val="1"/>
+              <ma14:wrappingTextBoxFlag xmlns:ma14="http://schemas.microsoft.com/office/mac/drawingml/2011/main" xmlns:a14="http://schemas.microsoft.com/office/drawing/2010/main" xmlns:m="http://schemas.openxmlformats.org/officeDocument/2006/math" xmlns="" val="1"/>
             </a:ext>
           </a:extLst>
         </p:spPr>
@@ -4083,7 +4091,7 @@
           </a:ln>
           <a:extLst>
             <a:ext uri="{C572A759-6A51-4108-AA02-DFA0A04FC94B}">
-              <ma14:wrappingTextBoxFlag xmlns="" xmlns:m="http://schemas.openxmlformats.org/officeDocument/2006/math" xmlns:a14="http://schemas.microsoft.com/office/drawing/2010/main" xmlns:ma14="http://schemas.microsoft.com/office/mac/drawingml/2011/main" val="1"/>
+              <ma14:wrappingTextBoxFlag xmlns:ma14="http://schemas.microsoft.com/office/mac/drawingml/2011/main" xmlns:a14="http://schemas.microsoft.com/office/drawing/2010/main" xmlns:m="http://schemas.openxmlformats.org/officeDocument/2006/math" xmlns="" val="1"/>
             </a:ext>
           </a:extLst>
         </p:spPr>
@@ -4174,15 +4182,15 @@
             </a:r>
             <a:r>
               <a:rPr lang="en-US" dirty="0" smtClean="0"/>
-              <a:t> Calvary</a:t>
-            </a:r>
-            <a:r>
-              <a:rPr lang="en-US" dirty="0"/>
               <a:t> </a:t>
             </a:r>
             <a:r>
               <a:rPr lang="en-US" dirty="0" smtClean="0"/>
-              <a:t>and the 24</a:t>
+              <a:t>Cavalry and </a:t>
+            </a:r>
+            <a:r>
+              <a:rPr lang="en-US" dirty="0" smtClean="0"/>
+              <a:t>the 24</a:t>
             </a:r>
             <a:r>
               <a:rPr lang="en-US" baseline="30000" dirty="0" smtClean="0"/>
@@ -4226,7 +4234,15 @@
             </a:r>
             <a:r>
               <a:rPr lang="en-US" dirty="0" smtClean="0"/>
-              <a:t> Calvary soldiers by native Americans</a:t>
+              <a:t> </a:t>
+            </a:r>
+            <a:r>
+              <a:rPr lang="en-US" dirty="0" smtClean="0"/>
+              <a:t>Cavalry soldiers </a:t>
+            </a:r>
+            <a:r>
+              <a:rPr lang="en-US" dirty="0" smtClean="0"/>
+              <a:t>by native Americans</a:t>
             </a:r>
           </a:p>
           <a:p>
@@ -4555,7 +4571,7 @@
           </a:ln>
           <a:extLst>
             <a:ext uri="{C572A759-6A51-4108-AA02-DFA0A04FC94B}">
-              <ma14:wrappingTextBoxFlag xmlns="" xmlns:m="http://schemas.openxmlformats.org/officeDocument/2006/math" xmlns:a14="http://schemas.microsoft.com/office/drawing/2010/main" xmlns:ma14="http://schemas.microsoft.com/office/mac/drawingml/2011/main" val="1"/>
+              <ma14:wrappingTextBoxFlag xmlns:ma14="http://schemas.microsoft.com/office/mac/drawingml/2011/main" xmlns:a14="http://schemas.microsoft.com/office/drawing/2010/main" xmlns:m="http://schemas.openxmlformats.org/officeDocument/2006/math" xmlns="" val="1"/>
             </a:ext>
           </a:extLst>
         </p:spPr>
@@ -4853,7 +4869,7 @@
           </a:ln>
           <a:extLst>
             <a:ext uri="{C572A759-6A51-4108-AA02-DFA0A04FC94B}">
-              <ma14:wrappingTextBoxFlag xmlns="" xmlns:m="http://schemas.openxmlformats.org/officeDocument/2006/math" xmlns:a14="http://schemas.microsoft.com/office/drawing/2010/main" xmlns:ma14="http://schemas.microsoft.com/office/mac/drawingml/2011/main" val="1"/>
+              <ma14:wrappingTextBoxFlag xmlns:ma14="http://schemas.microsoft.com/office/mac/drawingml/2011/main" xmlns:a14="http://schemas.microsoft.com/office/drawing/2010/main" xmlns:m="http://schemas.openxmlformats.org/officeDocument/2006/math" xmlns="" val="1"/>
             </a:ext>
           </a:extLst>
         </p:spPr>
@@ -5311,7 +5327,7 @@
           </a:ln>
           <a:extLst>
             <a:ext uri="{C572A759-6A51-4108-AA02-DFA0A04FC94B}">
-              <ma14:wrappingTextBoxFlag xmlns="" xmlns:m="http://schemas.openxmlformats.org/officeDocument/2006/math" xmlns:a14="http://schemas.microsoft.com/office/drawing/2010/main" xmlns:ma14="http://schemas.microsoft.com/office/mac/drawingml/2011/main" val="1"/>
+              <ma14:wrappingTextBoxFlag xmlns:ma14="http://schemas.microsoft.com/office/mac/drawingml/2011/main" xmlns:a14="http://schemas.microsoft.com/office/drawing/2010/main" xmlns:m="http://schemas.openxmlformats.org/officeDocument/2006/math" xmlns="" val="1"/>
             </a:ext>
           </a:extLst>
         </p:spPr>
@@ -5577,7 +5593,7 @@
           </a:ln>
           <a:extLst>
             <a:ext uri="{C572A759-6A51-4108-AA02-DFA0A04FC94B}">
-              <ma14:wrappingTextBoxFlag xmlns="" xmlns:m="http://schemas.openxmlformats.org/officeDocument/2006/math" xmlns:a14="http://schemas.microsoft.com/office/drawing/2010/main" xmlns:ma14="http://schemas.microsoft.com/office/mac/drawingml/2011/main" val="1"/>
+              <ma14:wrappingTextBoxFlag xmlns:ma14="http://schemas.microsoft.com/office/mac/drawingml/2011/main" xmlns:a14="http://schemas.microsoft.com/office/drawing/2010/main" xmlns:m="http://schemas.openxmlformats.org/officeDocument/2006/math" xmlns="" val="1"/>
             </a:ext>
           </a:extLst>
         </p:spPr>
@@ -6078,7 +6094,7 @@
           </a:ln>
           <a:extLst>
             <a:ext uri="{C572A759-6A51-4108-AA02-DFA0A04FC94B}">
-              <ma14:wrappingTextBoxFlag xmlns="" xmlns:m="http://schemas.openxmlformats.org/officeDocument/2006/math" xmlns:a14="http://schemas.microsoft.com/office/drawing/2010/main" xmlns:ma14="http://schemas.microsoft.com/office/mac/drawingml/2011/main" val="1"/>
+              <ma14:wrappingTextBoxFlag xmlns:ma14="http://schemas.microsoft.com/office/mac/drawingml/2011/main" xmlns:a14="http://schemas.microsoft.com/office/drawing/2010/main" xmlns:m="http://schemas.openxmlformats.org/officeDocument/2006/math" xmlns="" val="1"/>
             </a:ext>
           </a:extLst>
         </p:spPr>
@@ -6337,7 +6353,7 @@
           </a:ln>
           <a:extLst>
             <a:ext uri="{C572A759-6A51-4108-AA02-DFA0A04FC94B}">
-              <ma14:wrappingTextBoxFlag xmlns="" xmlns:m="http://schemas.openxmlformats.org/officeDocument/2006/math" xmlns:a14="http://schemas.microsoft.com/office/drawing/2010/main" xmlns:ma14="http://schemas.microsoft.com/office/mac/drawingml/2011/main" val="1"/>
+              <ma14:wrappingTextBoxFlag xmlns:ma14="http://schemas.microsoft.com/office/mac/drawingml/2011/main" xmlns:a14="http://schemas.microsoft.com/office/drawing/2010/main" xmlns:m="http://schemas.openxmlformats.org/officeDocument/2006/math" xmlns="" val="1"/>
             </a:ext>
           </a:extLst>
         </p:spPr>
@@ -6824,7 +6840,7 @@
           </a:ln>
           <a:extLst>
             <a:ext uri="{C572A759-6A51-4108-AA02-DFA0A04FC94B}">
-              <ma14:wrappingTextBoxFlag xmlns="" xmlns:m="http://schemas.openxmlformats.org/officeDocument/2006/math" xmlns:a14="http://schemas.microsoft.com/office/drawing/2010/main" xmlns:ma14="http://schemas.microsoft.com/office/mac/drawingml/2011/main" val="1"/>
+              <ma14:wrappingTextBoxFlag xmlns:ma14="http://schemas.microsoft.com/office/mac/drawingml/2011/main" xmlns:a14="http://schemas.microsoft.com/office/drawing/2010/main" xmlns:m="http://schemas.openxmlformats.org/officeDocument/2006/math" xmlns="" val="1"/>
             </a:ext>
           </a:extLst>
         </p:spPr>
@@ -7087,7 +7103,7 @@
           </a:ln>
           <a:extLst>
             <a:ext uri="{C572A759-6A51-4108-AA02-DFA0A04FC94B}">
-              <ma14:wrappingTextBoxFlag xmlns="" xmlns:m="http://schemas.openxmlformats.org/officeDocument/2006/math" xmlns:a14="http://schemas.microsoft.com/office/drawing/2010/main" xmlns:ma14="http://schemas.microsoft.com/office/mac/drawingml/2011/main" val="1"/>
+              <ma14:wrappingTextBoxFlag xmlns:ma14="http://schemas.microsoft.com/office/mac/drawingml/2011/main" xmlns:a14="http://schemas.microsoft.com/office/drawing/2010/main" xmlns:m="http://schemas.openxmlformats.org/officeDocument/2006/math" xmlns="" val="1"/>
             </a:ext>
           </a:extLst>
         </p:spPr>
@@ -7574,7 +7590,7 @@
           </a:ln>
           <a:extLst>
             <a:ext uri="{C572A759-6A51-4108-AA02-DFA0A04FC94B}">
-              <ma14:wrappingTextBoxFlag xmlns="" xmlns:m="http://schemas.openxmlformats.org/officeDocument/2006/math" xmlns:a14="http://schemas.microsoft.com/office/drawing/2010/main" xmlns:ma14="http://schemas.microsoft.com/office/mac/drawingml/2011/main" val="1"/>
+              <ma14:wrappingTextBoxFlag xmlns:ma14="http://schemas.microsoft.com/office/mac/drawingml/2011/main" xmlns:a14="http://schemas.microsoft.com/office/drawing/2010/main" xmlns:m="http://schemas.openxmlformats.org/officeDocument/2006/math" xmlns="" val="1"/>
             </a:ext>
           </a:extLst>
         </p:spPr>
@@ -7837,7 +7853,7 @@
           </a:ln>
           <a:extLst>
             <a:ext uri="{C572A759-6A51-4108-AA02-DFA0A04FC94B}">
-              <ma14:wrappingTextBoxFlag xmlns="" xmlns:m="http://schemas.openxmlformats.org/officeDocument/2006/math" xmlns:a14="http://schemas.microsoft.com/office/drawing/2010/main" xmlns:ma14="http://schemas.microsoft.com/office/mac/drawingml/2011/main" val="1"/>
+              <ma14:wrappingTextBoxFlag xmlns:ma14="http://schemas.microsoft.com/office/mac/drawingml/2011/main" xmlns:a14="http://schemas.microsoft.com/office/drawing/2010/main" xmlns:m="http://schemas.openxmlformats.org/officeDocument/2006/math" xmlns="" val="1"/>
             </a:ext>
           </a:extLst>
         </p:spPr>
@@ -7963,7 +7979,11 @@
             </a:pPr>
             <a:r>
               <a:rPr lang="en-US" dirty="0" smtClean="0"/>
-              <a:t>Calvary deactivated in 1944 leading into WW-II</a:t>
+              <a:t>Cavalry deactivated </a:t>
+            </a:r>
+            <a:r>
+              <a:rPr lang="en-US" dirty="0" smtClean="0"/>
+              <a:t>in 1944 leading into WW-II</a:t>
             </a:r>
           </a:p>
           <a:p>
@@ -8243,7 +8263,7 @@
           </a:ln>
           <a:extLst>
             <a:ext uri="{C572A759-6A51-4108-AA02-DFA0A04FC94B}">
-              <ma14:wrappingTextBoxFlag xmlns="" xmlns:m="http://schemas.openxmlformats.org/officeDocument/2006/math" xmlns:a14="http://schemas.microsoft.com/office/drawing/2010/main" xmlns:ma14="http://schemas.microsoft.com/office/mac/drawingml/2011/main" val="1"/>
+              <ma14:wrappingTextBoxFlag xmlns:ma14="http://schemas.microsoft.com/office/mac/drawingml/2011/main" xmlns:a14="http://schemas.microsoft.com/office/drawing/2010/main" xmlns:m="http://schemas.openxmlformats.org/officeDocument/2006/math" xmlns="" val="1"/>
             </a:ext>
           </a:extLst>
         </p:spPr>
@@ -8506,7 +8526,7 @@
           </a:ln>
           <a:extLst>
             <a:ext uri="{C572A759-6A51-4108-AA02-DFA0A04FC94B}">
-              <ma14:wrappingTextBoxFlag xmlns="" xmlns:m="http://schemas.openxmlformats.org/officeDocument/2006/math" xmlns:a14="http://schemas.microsoft.com/office/drawing/2010/main" xmlns:ma14="http://schemas.microsoft.com/office/mac/drawingml/2011/main" val="1"/>
+              <ma14:wrappingTextBoxFlag xmlns:ma14="http://schemas.microsoft.com/office/mac/drawingml/2011/main" xmlns:a14="http://schemas.microsoft.com/office/drawing/2010/main" xmlns:m="http://schemas.openxmlformats.org/officeDocument/2006/math" xmlns="" val="1"/>
             </a:ext>
           </a:extLst>
         </p:spPr>
@@ -8659,15 +8679,7 @@
             </a:pPr>
             <a:r>
               <a:rPr lang="en-US" dirty="0" smtClean="0"/>
-              <a:t>People like those of </a:t>
-            </a:r>
-            <a:r>
-              <a:rPr lang="en-US" dirty="0" smtClean="0"/>
-              <a:t>the </a:t>
-            </a:r>
-            <a:r>
-              <a:rPr lang="en-US" dirty="0" smtClean="0"/>
-              <a:t>Buffalo Soldiers Motorcycle Club who proudly take their nickname and honor their legacy</a:t>
+              <a:t>People like those of the Buffalo Soldiers Motorcycle Club who proudly take their nickname and honor their legacy</a:t>
             </a:r>
             <a:endParaRPr lang="en-US" dirty="0"/>
           </a:p>
@@ -8718,7 +8730,7 @@
           </a:ln>
           <a:extLst>
             <a:ext uri="{C572A759-6A51-4108-AA02-DFA0A04FC94B}">
-              <ma14:wrappingTextBoxFlag xmlns="" xmlns:m="http://schemas.openxmlformats.org/officeDocument/2006/math" xmlns:a14="http://schemas.microsoft.com/office/drawing/2010/main" xmlns:ma14="http://schemas.microsoft.com/office/mac/drawingml/2011/main" val="1"/>
+              <ma14:wrappingTextBoxFlag xmlns:ma14="http://schemas.microsoft.com/office/mac/drawingml/2011/main" xmlns:a14="http://schemas.microsoft.com/office/drawing/2010/main" xmlns:m="http://schemas.openxmlformats.org/officeDocument/2006/math" xmlns="" val="1"/>
             </a:ext>
           </a:extLst>
         </p:spPr>
